--- a/MTP 2/presentation/mtp2_presentation.pptx
+++ b/MTP 2/presentation/mtp2_presentation.pptx
@@ -131,33 +131,33 @@
   <p:extLst>
     <p:ext uri="{521415D9-36F7-43E2-AB2F-B90AF26B5E84}">
       <p14:sectionLst xmlns:p14="http://schemas.microsoft.com/office/powerpoint/2010/main">
-        <p14:section name="Title" id="{e140febf-4937-5b5f-e6c8-b81e6c9e89f5}">
+        <p14:section name="Title" id="{1d5a36a2-086b-6242-b0bc-0222f9e98af8}">
           <p14:sldIdLst>
             <p14:sldId id="256"/>
             <p14:sldId id="257"/>
           </p14:sldIdLst>
         </p14:section>
-        <p14:section name="Overview and motivation" id="{4230c6a8-d602-e32a-e311-b1f1b5ef99ae}">
+        <p14:section name="Overview and motivation" id="{41a35c42-d983-7fec-d8c7-9d26b63163aa}">
           <p14:sldIdLst>
             <p14:sldId id="258"/>
             <p14:sldId id="259"/>
             <p14:sldId id="260"/>
           </p14:sldIdLst>
         </p14:section>
-        <p14:section name="Related works" id="{862c778d-6cc0-2264-bec9-aa4d3b4fea49}">
+        <p14:section name="Related works" id="{08d9fe04-0cfc-c02c-fb39-d3198ace6c66}">
           <p14:sldIdLst>
             <p14:sldId id="261"/>
             <p14:sldId id="262"/>
           </p14:sldIdLst>
         </p14:section>
-        <p14:section name="Research gaps and objectives" id="{fe832257-aa1a-78ce-9e10-1d181e7aa1ac}">
+        <p14:section name="Research gaps and objectives" id="{fc60527b-5f2b-3c4e-0ed9-421f04e47c68}">
           <p14:sldIdLst>
             <p14:sldId id="263"/>
             <p14:sldId id="264"/>
             <p14:sldId id="265"/>
           </p14:sldIdLst>
         </p14:section>
-        <p14:section name="Dataset and methodology" id="{1d5c8c8f-10be-5c89-f41e-68d1e11a8716}">
+        <p14:section name="Dataset and methodology" id="{a2ce735f-6bf8-3952-e464-9b7d26c889e0}">
           <p14:sldIdLst>
             <p14:sldId id="266"/>
             <p14:sldId id="267"/>
@@ -165,7 +165,7 @@
             <p14:sldId id="269"/>
           </p14:sldIdLst>
         </p14:section>
-        <p14:section name="Results" id="{300cb581-01b8-906a-eafa-497832018c55}">
+        <p14:section name="Results" id="{7af15a94-1e84-408f-789f-53b71d9a5a7e}">
           <p14:sldIdLst>
             <p14:sldId id="270"/>
             <p14:sldId id="271"/>
@@ -175,14 +175,14 @@
             <p14:sldId id="275"/>
           </p14:sldIdLst>
         </p14:section>
-        <p14:section name="Conclusion and future work" id="{176f3858-c55b-9313-d31a-44b26b12e9a3}">
+        <p14:section name="Conclusion and future work" id="{53b37261-3cc0-d367-4b5a-f64916113bd8}">
           <p14:sldIdLst>
             <p14:sldId id="276"/>
             <p14:sldId id="277"/>
             <p14:sldId id="278"/>
           </p14:sldIdLst>
         </p14:section>
-        <p14:section name="References" id="{aa75aa9b-fa2d-40ab-5255-39474bd95e65}">
+        <p14:section name="References" id="{f1870a25-d1bc-cefc-e238-0215b3b3274e}">
           <p14:sldIdLst>
             <p14:sldId id="279"/>
             <p14:sldId id="280"/>
@@ -2803,8 +2803,8 @@
         </p:nvSpPr>
         <p:spPr>
           <a:xfrm>
-            <a:off x="274320" y="457200"/>
-            <a:ext cx="8595360" cy="1261872"/>
+            <a:off x="274320" y="566928"/>
+            <a:ext cx="8595360" cy="1005840"/>
           </a:xfrm>
           <a:prstGeom prst="rect">
             <a:avLst/>
@@ -2817,7 +2817,7 @@
           <a:lstStyle>
             <a:lvl1pPr algn="ctr" indent="0" marL="0">
               <a:buNone/>
-              <a:defRPr lang="en-US" sz="2400" dirty="0">
+              <a:defRPr lang="en-US" sz="2600" dirty="0">
                 <a:solidFill>
                   <a:schemeClr val="bg1"/>
                 </a:solidFill>
@@ -2828,7 +2828,7 @@
             <a:pPr algn="ctr" indent="0" marL="0">
               <a:buNone/>
             </a:pPr>
-            <a:endParaRPr lang="en-US" sz="2400" dirty="0"/>
+            <a:endParaRPr lang="en-US" sz="2600" dirty="0"/>
           </a:p>
         </p:txBody>
       </p:sp>
@@ -3640,12 +3640,12 @@
         </p:nvSpPr>
         <p:spPr>
           <a:xfrm>
-            <a:off x="146304" y="457200"/>
-            <a:ext cx="8851392" cy="1261872"/>
+            <a:off x="146304" y="566928"/>
+            <a:ext cx="8851392" cy="1005840"/>
           </a:xfrm>
           <a:prstGeom prst="roundRect">
             <a:avLst>
-              <a:gd name="adj" fmla="val 5072"/>
+              <a:gd name="adj" fmla="val 6364"/>
             </a:avLst>
           </a:prstGeom>
           <a:solidFill>
@@ -3676,8 +3676,8 @@
         </p:nvSpPr>
         <p:spPr>
           <a:xfrm>
-            <a:off x="274320" y="457200"/>
-            <a:ext cx="8595360" cy="1261872"/>
+            <a:off x="274320" y="566928"/>
+            <a:ext cx="8595360" cy="1005840"/>
           </a:xfrm>
           <a:prstGeom prst="rect">
             <a:avLst/>
@@ -3693,14 +3693,14 @@
               <a:buNone/>
             </a:pPr>
             <a:r>
-              <a:rPr lang="en-US" sz="2400" dirty="0">
+              <a:rPr lang="en-US" sz="2600" dirty="0">
                 <a:solidFill>
                   <a:schemeClr val="bg1"/>
                 </a:solidFill>
               </a:rPr>
-              <a:t>Quantifying SZZ-Induced Label Noise in Just-In-Time Software Defect Prediction under Verification-Latency-Aware Online Evaluation</a:t>
-            </a:r>
-            <a:endParaRPr lang="en-US" sz="2400" dirty="0"/>
+              <a:t>Label Noise in Just-In-Time Software Defect Prediction</a:t>
+            </a:r>
+            <a:endParaRPr lang="en-US" sz="2600" dirty="0"/>
           </a:p>
         </p:txBody>
       </p:sp>
@@ -4022,7 +4022,7 @@
                   <a:schemeClr val="bg1"/>
                 </a:solidFill>
               </a:rPr>
-              <a:t>Objectives</a:t>
+              <a:t>Research Questions</a:t>
             </a:r>
             <a:endParaRPr lang="en-US" sz="2400" dirty="0"/>
           </a:p>
@@ -4053,7 +4053,7 @@
           <a:p>
             <a:pPr marL="177800" indent="-177800">
               <a:spcAft>
-                <a:spcPts val="500"/>
+                <a:spcPts val="600"/>
               </a:spcAft>
               <a:buSzPct val="100000"/>
               <a:buChar char="•"/>
@@ -4064,7 +4064,7 @@
                   <a:schemeClr val="tx1"/>
                 </a:solidFill>
               </a:rPr>
-              <a:t>Objective 1: </a:t>
+              <a:t>RQ1: </a:t>
             </a:r>
             <a:r>
               <a:rPr lang="en-US" sz="1700" dirty="0">
@@ -4072,14 +4072,14 @@
                   <a:schemeClr val="tx1"/>
                 </a:solidFill>
               </a:rPr>
-              <a:t>Generate the labels of six SZZ variants for a dataset with independent reference labels, and characterise their false positive and false negative rates.</a:t>
+              <a:t>How much do the labels of SZZ variants disagree with one another and with independent reference labels, and what type of error does each variant make?</a:t>
             </a:r>
             <a:endParaRPr lang="en-US" sz="1700" dirty="0"/>
           </a:p>
           <a:p>
             <a:pPr marL="177800" indent="-177800">
               <a:spcAft>
-                <a:spcPts val="500"/>
+                <a:spcPts val="600"/>
               </a:spcAft>
               <a:buSzPct val="100000"/>
               <a:buChar char="•"/>
@@ -4090,7 +4090,7 @@
                   <a:schemeClr val="tx1"/>
                 </a:solidFill>
               </a:rPr>
-              <a:t>Objective 2: </a:t>
+              <a:t>RQ2: </a:t>
             </a:r>
             <a:r>
               <a:rPr lang="en-US" sz="1700" dirty="0">
@@ -4098,14 +4098,14 @@
                   <a:schemeClr val="tx1"/>
                 </a:solidFill>
               </a:rPr>
-              <a:t>Examine the agreement between the variants and identify the sources of their errors.</a:t>
+              <a:t>How does the choice of the label source affect the measured performance of JIT-SDP models under different evaluation settings?</a:t>
             </a:r>
             <a:endParaRPr lang="en-US" sz="1700" dirty="0"/>
           </a:p>
           <a:p>
             <a:pPr marL="177800" indent="-177800">
               <a:spcAft>
-                <a:spcPts val="500"/>
+                <a:spcPts val="600"/>
               </a:spcAft>
               <a:buSzPct val="100000"/>
               <a:buChar char="•"/>
@@ -4116,7 +4116,7 @@
                   <a:schemeClr val="tx1"/>
                 </a:solidFill>
               </a:rPr>
-              <a:t>Objective 3: </a:t>
+              <a:t>RQ3: </a:t>
             </a:r>
             <a:r>
               <a:rPr lang="en-US" sz="1700" dirty="0">
@@ -4124,14 +4124,14 @@
                   <a:schemeClr val="tx1"/>
                 </a:solidFill>
               </a:rPr>
-              <a:t>Measure how much the evaluation procedure changes the measured performance of JIT-SDP models.</a:t>
+              <a:t>Through which mechanism does label noise reduce the performance of an online learner, and which type of error is responsible? (planned for MTP III)</a:t>
             </a:r>
             <a:endParaRPr lang="en-US" sz="1700" dirty="0"/>
           </a:p>
           <a:p>
             <a:pPr marL="177800" indent="-177800">
               <a:spcAft>
-                <a:spcPts val="500"/>
+                <a:spcPts val="600"/>
               </a:spcAft>
               <a:buSzPct val="100000"/>
               <a:buChar char="•"/>
@@ -4142,7 +4142,7 @@
                   <a:schemeClr val="tx1"/>
                 </a:solidFill>
               </a:rPr>
-              <a:t>Objective 4: </a:t>
+              <a:t>RQ4: </a:t>
             </a:r>
             <a:r>
               <a:rPr lang="en-US" sz="1700" dirty="0">
@@ -4150,59 +4150,7 @@
                   <a:schemeClr val="tx1"/>
                 </a:solidFill>
               </a:rPr>
-              <a:t>Measure the loss caused by SZZ labels for an online learner under verification latency.</a:t>
-            </a:r>
-            <a:endParaRPr lang="en-US" sz="1700" dirty="0"/>
-          </a:p>
-          <a:p>
-            <a:pPr marL="177800" indent="-177800">
-              <a:spcAft>
-                <a:spcPts val="500"/>
-              </a:spcAft>
-              <a:buSzPct val="100000"/>
-              <a:buChar char="•"/>
-            </a:pPr>
-            <a:r>
-              <a:rPr lang="en-US" sz="1700" b="1" dirty="0">
-                <a:solidFill>
-                  <a:schemeClr val="tx1"/>
-                </a:solidFill>
-              </a:rPr>
-              <a:t>Objective 5: </a:t>
-            </a:r>
-            <a:r>
-              <a:rPr lang="en-US" sz="1700" dirty="0">
-                <a:solidFill>
-                  <a:schemeClr val="tx1"/>
-                </a:solidFill>
-              </a:rPr>
-              <a:t>Identify the type of labelling error responsible for the loss and its mechanism. (MTP III)</a:t>
-            </a:r>
-            <a:endParaRPr lang="en-US" sz="1700" dirty="0"/>
-          </a:p>
-          <a:p>
-            <a:pPr marL="177800" indent="-177800">
-              <a:spcAft>
-                <a:spcPts val="500"/>
-              </a:spcAft>
-              <a:buSzPct val="100000"/>
-              <a:buChar char="•"/>
-            </a:pPr>
-            <a:r>
-              <a:rPr lang="en-US" sz="1700" b="1" dirty="0">
-                <a:solidFill>
-                  <a:schemeClr val="tx1"/>
-                </a:solidFill>
-              </a:rPr>
-              <a:t>Objective 6: </a:t>
-            </a:r>
-            <a:r>
-              <a:rPr lang="en-US" sz="1700" dirty="0">
-                <a:solidFill>
-                  <a:schemeClr val="tx1"/>
-                </a:solidFill>
-              </a:rPr>
-              <a:t>Design and evaluate a noise-aware online learner. (MTP IV)</a:t>
+              <a:t>Can an online learner be made less sensitive to SZZ label noise without access to clean labels? (planned for MTP IV)</a:t>
             </a:r>
             <a:endParaRPr lang="en-US" sz="1700" dirty="0"/>
           </a:p>
@@ -10660,7 +10608,7 @@
                   <a:schemeClr val="tx1"/>
                 </a:solidFill>
               </a:rPr>
-              <a:t>Research Questions and Objectives</a:t>
+              <a:t>Objectives and Research Questions</a:t>
             </a:r>
             <a:endParaRPr lang="en-US" sz="1700" dirty="0"/>
           </a:p>
@@ -11732,7 +11680,7 @@
                   <a:schemeClr val="tx1"/>
                 </a:solidFill>
               </a:rPr>
-              <a:t>Literature Survey</a:t>
+              <a:t>Literature Survey,</a:t>
             </a:r>
             <a:endParaRPr lang="en-US" sz="1150" dirty="0"/>
           </a:p>
@@ -11746,7 +11694,7 @@
                   <a:schemeClr val="tx1"/>
                 </a:solidFill>
               </a:rPr>
-              <a:t>(Research Gaps,</a:t>
+              <a:t>Dataset and</a:t>
             </a:r>
             <a:endParaRPr lang="en-US" sz="1150" dirty="0"/>
           </a:p>
@@ -11760,7 +11708,7 @@
                   <a:schemeClr val="tx1"/>
                 </a:solidFill>
               </a:rPr>
-              <a:t>Dataset)</a:t>
+              <a:t>Methodology</a:t>
             </a:r>
             <a:endParaRPr lang="en-US" sz="1150" dirty="0"/>
           </a:p>
@@ -16687,7 +16635,7 @@
                   <a:schemeClr val="bg1"/>
                 </a:solidFill>
               </a:rPr>
-              <a:t>Research Questions</a:t>
+              <a:t>Objectives</a:t>
             </a:r>
             <a:endParaRPr lang="en-US" sz="2400" dirty="0"/>
           </a:p>
@@ -16729,7 +16677,7 @@
                   <a:schemeClr val="tx1"/>
                 </a:solidFill>
               </a:rPr>
-              <a:t>RQ1: </a:t>
+              <a:t>Objective 1: </a:t>
             </a:r>
             <a:r>
               <a:rPr lang="en-US" sz="1700" dirty="0">
@@ -16737,7 +16685,7 @@
                   <a:schemeClr val="tx1"/>
                 </a:solidFill>
               </a:rPr>
-              <a:t>How much do the labels of SZZ variants disagree with one another and with independent reference labels, and what type of error does each variant make?</a:t>
+              <a:t>To quantify the label noise introduced by SZZ and its variants, by comparing their labels with independent reference labels over complete project histories.</a:t>
             </a:r>
             <a:endParaRPr lang="en-US" sz="1700" dirty="0"/>
           </a:p>
@@ -16755,7 +16703,7 @@
                   <a:schemeClr val="tx1"/>
                 </a:solidFill>
               </a:rPr>
-              <a:t>RQ2: </a:t>
+              <a:t>Objective 2: </a:t>
             </a:r>
             <a:r>
               <a:rPr lang="en-US" sz="1700" dirty="0">
@@ -16763,7 +16711,7 @@
                   <a:schemeClr val="tx1"/>
                 </a:solidFill>
               </a:rPr>
-              <a:t>How does the choice of the label source affect the measured performance of JIT-SDP models under different evaluation settings?</a:t>
+              <a:t>To measure the effect of this noise on JIT-SDP models under a realistic evaluation that respects the order of the commits and the delay of the labels, and to separate it from the effect of the evaluation procedure.</a:t>
             </a:r>
             <a:endParaRPr lang="en-US" sz="1700" dirty="0"/>
           </a:p>
@@ -16781,7 +16729,7 @@
                   <a:schemeClr val="tx1"/>
                 </a:solidFill>
               </a:rPr>
-              <a:t>RQ3: </a:t>
+              <a:t>Objective 3: </a:t>
             </a:r>
             <a:r>
               <a:rPr lang="en-US" sz="1700" dirty="0">
@@ -16789,33 +16737,7 @@
                   <a:schemeClr val="tx1"/>
                 </a:solidFill>
               </a:rPr>
-              <a:t>Through which mechanism does label noise reduce the performance of an online learner, and which type of error is responsible? (planned for MTP III)</a:t>
-            </a:r>
-            <a:endParaRPr lang="en-US" sz="1700" dirty="0"/>
-          </a:p>
-          <a:p>
-            <a:pPr marL="177800" indent="-177800">
-              <a:spcAft>
-                <a:spcPts val="600"/>
-              </a:spcAft>
-              <a:buSzPct val="100000"/>
-              <a:buChar char="•"/>
-            </a:pPr>
-            <a:r>
-              <a:rPr lang="en-US" sz="1700" b="1" dirty="0">
-                <a:solidFill>
-                  <a:schemeClr val="tx1"/>
-                </a:solidFill>
-              </a:rPr>
-              <a:t>RQ4: </a:t>
-            </a:r>
-            <a:r>
-              <a:rPr lang="en-US" sz="1700" dirty="0">
-                <a:solidFill>
-                  <a:schemeClr val="tx1"/>
-                </a:solidFill>
-              </a:rPr>
-              <a:t>Can an online learner be made less sensitive to SZZ label noise without access to clean labels? (planned for MTP IV)</a:t>
+              <a:t>To identify how the noise affects an online learner, and to develop a noise-aware online learning approach that reduces its effect. (planned for MTP III and MTP IV)</a:t>
             </a:r>
             <a:endParaRPr lang="en-US" sz="1700" dirty="0"/>
           </a:p>
